--- a/Презентация.pptx
+++ b/Презентация.pptx
@@ -222,7 +222,7 @@
           <a:p>
             <a:fld id="{FCA9662B-07FC-4607-B70F-C547184D43C7}" type="datetimeFigureOut">
               <a:rPr lang="ru-RU" smtClean="0"/>
-              <a:t>17.02.2026</a:t>
+              <a:t>18.03.2026</a:t>
             </a:fld>
             <a:endParaRPr lang="ru-RU"/>
           </a:p>
@@ -752,7 +752,7 @@
           <a:p>
             <a:fld id="{5BCAD085-E8A6-8845-BD4E-CB4CCA059FC4}" type="datetimeFigureOut">
               <a:rPr lang="en-US" smtClean="0"/>
-              <a:t>2/17/2026</a:t>
+              <a:t>3/18/2026</a:t>
             </a:fld>
             <a:endParaRPr lang="en-US"/>
           </a:p>
@@ -810,13 +810,13 @@
   <p:clrMapOvr>
     <a:masterClrMapping/>
   </p:clrMapOvr>
-  <mc:AlternateContent xmlns:mc="http://schemas.openxmlformats.org/markup-compatibility/2006">
-    <mc:Choice xmlns:p159="http://schemas.microsoft.com/office/powerpoint/2015/09/main" Requires="p159">
+  <mc:AlternateContent xmlns:mc="http://schemas.openxmlformats.org/markup-compatibility/2006" xmlns:p159="http://schemas.microsoft.com/office/powerpoint/2015/09/main">
+    <mc:Choice Requires="p159">
       <p:transition xmlns:p14="http://schemas.microsoft.com/office/powerpoint/2010/main" spd="slow" p14:dur="2000">
         <p159:morph option="byChar"/>
       </p:transition>
     </mc:Choice>
-    <mc:Fallback>
+    <mc:Fallback xmlns="">
       <p:transition spd="slow">
         <p:fade/>
       </p:transition>
@@ -932,7 +932,7 @@
           <a:p>
             <a:fld id="{5BCAD085-E8A6-8845-BD4E-CB4CCA059FC4}" type="datetimeFigureOut">
               <a:rPr lang="en-US" smtClean="0"/>
-              <a:t>2/17/2026</a:t>
+              <a:t>3/18/2026</a:t>
             </a:fld>
             <a:endParaRPr lang="en-US"/>
           </a:p>
@@ -990,13 +990,13 @@
   <p:clrMapOvr>
     <a:masterClrMapping/>
   </p:clrMapOvr>
-  <mc:AlternateContent xmlns:mc="http://schemas.openxmlformats.org/markup-compatibility/2006">
-    <mc:Choice xmlns:p159="http://schemas.microsoft.com/office/powerpoint/2015/09/main" Requires="p159">
+  <mc:AlternateContent xmlns:mc="http://schemas.openxmlformats.org/markup-compatibility/2006" xmlns:p159="http://schemas.microsoft.com/office/powerpoint/2015/09/main">
+    <mc:Choice Requires="p159">
       <p:transition xmlns:p14="http://schemas.microsoft.com/office/powerpoint/2010/main" spd="slow" p14:dur="2000">
         <p159:morph option="byChar"/>
       </p:transition>
     </mc:Choice>
-    <mc:Fallback>
+    <mc:Fallback xmlns="">
       <p:transition spd="slow">
         <p:fade/>
       </p:transition>
@@ -1122,7 +1122,7 @@
           <a:p>
             <a:fld id="{5BCAD085-E8A6-8845-BD4E-CB4CCA059FC4}" type="datetimeFigureOut">
               <a:rPr lang="en-US" smtClean="0"/>
-              <a:t>2/17/2026</a:t>
+              <a:t>3/18/2026</a:t>
             </a:fld>
             <a:endParaRPr lang="en-US"/>
           </a:p>
@@ -1180,13 +1180,13 @@
   <p:clrMapOvr>
     <a:masterClrMapping/>
   </p:clrMapOvr>
-  <mc:AlternateContent xmlns:mc="http://schemas.openxmlformats.org/markup-compatibility/2006">
-    <mc:Choice xmlns:p159="http://schemas.microsoft.com/office/powerpoint/2015/09/main" Requires="p159">
+  <mc:AlternateContent xmlns:mc="http://schemas.openxmlformats.org/markup-compatibility/2006" xmlns:p159="http://schemas.microsoft.com/office/powerpoint/2015/09/main">
+    <mc:Choice Requires="p159">
       <p:transition xmlns:p14="http://schemas.microsoft.com/office/powerpoint/2010/main" spd="slow" p14:dur="2000">
         <p159:morph option="byChar"/>
       </p:transition>
     </mc:Choice>
-    <mc:Fallback>
+    <mc:Fallback xmlns="">
       <p:transition spd="slow">
         <p:fade/>
       </p:transition>
@@ -1302,7 +1302,7 @@
           <a:p>
             <a:fld id="{5BCAD085-E8A6-8845-BD4E-CB4CCA059FC4}" type="datetimeFigureOut">
               <a:rPr lang="en-US" smtClean="0"/>
-              <a:t>2/17/2026</a:t>
+              <a:t>3/18/2026</a:t>
             </a:fld>
             <a:endParaRPr lang="en-US"/>
           </a:p>
@@ -1360,13 +1360,13 @@
   <p:clrMapOvr>
     <a:masterClrMapping/>
   </p:clrMapOvr>
-  <mc:AlternateContent xmlns:mc="http://schemas.openxmlformats.org/markup-compatibility/2006">
-    <mc:Choice xmlns:p159="http://schemas.microsoft.com/office/powerpoint/2015/09/main" Requires="p159">
+  <mc:AlternateContent xmlns:mc="http://schemas.openxmlformats.org/markup-compatibility/2006" xmlns:p159="http://schemas.microsoft.com/office/powerpoint/2015/09/main">
+    <mc:Choice Requires="p159">
       <p:transition xmlns:p14="http://schemas.microsoft.com/office/powerpoint/2010/main" spd="slow" p14:dur="2000">
         <p159:morph option="byChar"/>
       </p:transition>
     </mc:Choice>
-    <mc:Fallback>
+    <mc:Fallback xmlns="">
       <p:transition spd="slow">
         <p:fade/>
       </p:transition>
@@ -1559,7 +1559,7 @@
           <a:p>
             <a:fld id="{5BCAD085-E8A6-8845-BD4E-CB4CCA059FC4}" type="datetimeFigureOut">
               <a:rPr lang="en-US" smtClean="0"/>
-              <a:t>2/17/2026</a:t>
+              <a:t>3/18/2026</a:t>
             </a:fld>
             <a:endParaRPr lang="en-US"/>
           </a:p>
@@ -1617,13 +1617,13 @@
   <p:clrMapOvr>
     <a:masterClrMapping/>
   </p:clrMapOvr>
-  <mc:AlternateContent xmlns:mc="http://schemas.openxmlformats.org/markup-compatibility/2006">
-    <mc:Choice xmlns:p159="http://schemas.microsoft.com/office/powerpoint/2015/09/main" Requires="p159">
+  <mc:AlternateContent xmlns:mc="http://schemas.openxmlformats.org/markup-compatibility/2006" xmlns:p159="http://schemas.microsoft.com/office/powerpoint/2015/09/main">
+    <mc:Choice Requires="p159">
       <p:transition xmlns:p14="http://schemas.microsoft.com/office/powerpoint/2010/main" spd="slow" p14:dur="2000">
         <p159:morph option="byChar"/>
       </p:transition>
     </mc:Choice>
-    <mc:Fallback>
+    <mc:Fallback xmlns="">
       <p:transition spd="slow">
         <p:fade/>
       </p:transition>
@@ -1856,7 +1856,7 @@
           <a:p>
             <a:fld id="{5BCAD085-E8A6-8845-BD4E-CB4CCA059FC4}" type="datetimeFigureOut">
               <a:rPr lang="en-US" smtClean="0"/>
-              <a:t>2/17/2026</a:t>
+              <a:t>3/18/2026</a:t>
             </a:fld>
             <a:endParaRPr lang="en-US"/>
           </a:p>
@@ -1914,13 +1914,13 @@
   <p:clrMapOvr>
     <a:masterClrMapping/>
   </p:clrMapOvr>
-  <mc:AlternateContent xmlns:mc="http://schemas.openxmlformats.org/markup-compatibility/2006">
-    <mc:Choice xmlns:p159="http://schemas.microsoft.com/office/powerpoint/2015/09/main" Requires="p159">
+  <mc:AlternateContent xmlns:mc="http://schemas.openxmlformats.org/markup-compatibility/2006" xmlns:p159="http://schemas.microsoft.com/office/powerpoint/2015/09/main">
+    <mc:Choice Requires="p159">
       <p:transition xmlns:p14="http://schemas.microsoft.com/office/powerpoint/2010/main" spd="slow" p14:dur="2000">
         <p159:morph option="byChar"/>
       </p:transition>
     </mc:Choice>
-    <mc:Fallback>
+    <mc:Fallback xmlns="">
       <p:transition spd="slow">
         <p:fade/>
       </p:transition>
@@ -2287,7 +2287,7 @@
           <a:p>
             <a:fld id="{5BCAD085-E8A6-8845-BD4E-CB4CCA059FC4}" type="datetimeFigureOut">
               <a:rPr lang="en-US" smtClean="0"/>
-              <a:t>2/17/2026</a:t>
+              <a:t>3/18/2026</a:t>
             </a:fld>
             <a:endParaRPr lang="en-US"/>
           </a:p>
@@ -2345,13 +2345,13 @@
   <p:clrMapOvr>
     <a:masterClrMapping/>
   </p:clrMapOvr>
-  <mc:AlternateContent xmlns:mc="http://schemas.openxmlformats.org/markup-compatibility/2006">
-    <mc:Choice xmlns:p159="http://schemas.microsoft.com/office/powerpoint/2015/09/main" Requires="p159">
+  <mc:AlternateContent xmlns:mc="http://schemas.openxmlformats.org/markup-compatibility/2006" xmlns:p159="http://schemas.microsoft.com/office/powerpoint/2015/09/main">
+    <mc:Choice Requires="p159">
       <p:transition xmlns:p14="http://schemas.microsoft.com/office/powerpoint/2010/main" spd="slow" p14:dur="2000">
         <p159:morph option="byChar"/>
       </p:transition>
     </mc:Choice>
-    <mc:Fallback>
+    <mc:Fallback xmlns="">
       <p:transition spd="slow">
         <p:fade/>
       </p:transition>
@@ -2416,7 +2416,7 @@
           <a:p>
             <a:fld id="{5BCAD085-E8A6-8845-BD4E-CB4CCA059FC4}" type="datetimeFigureOut">
               <a:rPr lang="en-US" smtClean="0"/>
-              <a:t>2/17/2026</a:t>
+              <a:t>3/18/2026</a:t>
             </a:fld>
             <a:endParaRPr lang="en-US"/>
           </a:p>
@@ -2474,13 +2474,13 @@
   <p:clrMapOvr>
     <a:masterClrMapping/>
   </p:clrMapOvr>
-  <mc:AlternateContent xmlns:mc="http://schemas.openxmlformats.org/markup-compatibility/2006">
-    <mc:Choice xmlns:p159="http://schemas.microsoft.com/office/powerpoint/2015/09/main" Requires="p159">
+  <mc:AlternateContent xmlns:mc="http://schemas.openxmlformats.org/markup-compatibility/2006" xmlns:p159="http://schemas.microsoft.com/office/powerpoint/2015/09/main">
+    <mc:Choice Requires="p159">
       <p:transition xmlns:p14="http://schemas.microsoft.com/office/powerpoint/2010/main" spd="slow" p14:dur="2000">
         <p159:morph option="byChar"/>
       </p:transition>
     </mc:Choice>
-    <mc:Fallback>
+    <mc:Fallback xmlns="">
       <p:transition spd="slow">
         <p:fade/>
       </p:transition>
@@ -2523,7 +2523,7 @@
           <a:p>
             <a:fld id="{5BCAD085-E8A6-8845-BD4E-CB4CCA059FC4}" type="datetimeFigureOut">
               <a:rPr lang="en-US" smtClean="0"/>
-              <a:t>2/17/2026</a:t>
+              <a:t>3/18/2026</a:t>
             </a:fld>
             <a:endParaRPr lang="en-US"/>
           </a:p>
@@ -2581,13 +2581,13 @@
   <p:clrMapOvr>
     <a:masterClrMapping/>
   </p:clrMapOvr>
-  <mc:AlternateContent xmlns:mc="http://schemas.openxmlformats.org/markup-compatibility/2006">
-    <mc:Choice xmlns:p159="http://schemas.microsoft.com/office/powerpoint/2015/09/main" Requires="p159">
+  <mc:AlternateContent xmlns:mc="http://schemas.openxmlformats.org/markup-compatibility/2006" xmlns:p159="http://schemas.microsoft.com/office/powerpoint/2015/09/main">
+    <mc:Choice Requires="p159">
       <p:transition xmlns:p14="http://schemas.microsoft.com/office/powerpoint/2010/main" spd="slow" p14:dur="2000">
         <p159:morph option="byChar"/>
       </p:transition>
     </mc:Choice>
-    <mc:Fallback>
+    <mc:Fallback xmlns="">
       <p:transition spd="slow">
         <p:fade/>
       </p:transition>
@@ -2810,7 +2810,7 @@
           <a:p>
             <a:fld id="{5BCAD085-E8A6-8845-BD4E-CB4CCA059FC4}" type="datetimeFigureOut">
               <a:rPr lang="en-US" smtClean="0"/>
-              <a:t>2/17/2026</a:t>
+              <a:t>3/18/2026</a:t>
             </a:fld>
             <a:endParaRPr lang="en-US"/>
           </a:p>
@@ -2868,13 +2868,13 @@
   <p:clrMapOvr>
     <a:masterClrMapping/>
   </p:clrMapOvr>
-  <mc:AlternateContent xmlns:mc="http://schemas.openxmlformats.org/markup-compatibility/2006">
-    <mc:Choice xmlns:p159="http://schemas.microsoft.com/office/powerpoint/2015/09/main" Requires="p159">
+  <mc:AlternateContent xmlns:mc="http://schemas.openxmlformats.org/markup-compatibility/2006" xmlns:p159="http://schemas.microsoft.com/office/powerpoint/2015/09/main">
+    <mc:Choice Requires="p159">
       <p:transition xmlns:p14="http://schemas.microsoft.com/office/powerpoint/2010/main" spd="slow" p14:dur="2000">
         <p159:morph option="byChar"/>
       </p:transition>
     </mc:Choice>
-    <mc:Fallback>
+    <mc:Fallback xmlns="">
       <p:transition spd="slow">
         <p:fade/>
       </p:transition>
@@ -3074,7 +3074,7 @@
           <a:p>
             <a:fld id="{5BCAD085-E8A6-8845-BD4E-CB4CCA059FC4}" type="datetimeFigureOut">
               <a:rPr lang="en-US" smtClean="0"/>
-              <a:t>2/17/2026</a:t>
+              <a:t>3/18/2026</a:t>
             </a:fld>
             <a:endParaRPr lang="en-US"/>
           </a:p>
@@ -3132,13 +3132,13 @@
   <p:clrMapOvr>
     <a:masterClrMapping/>
   </p:clrMapOvr>
-  <mc:AlternateContent xmlns:mc="http://schemas.openxmlformats.org/markup-compatibility/2006">
-    <mc:Choice xmlns:p159="http://schemas.microsoft.com/office/powerpoint/2015/09/main" Requires="p159">
+  <mc:AlternateContent xmlns:mc="http://schemas.openxmlformats.org/markup-compatibility/2006" xmlns:p159="http://schemas.microsoft.com/office/powerpoint/2015/09/main">
+    <mc:Choice Requires="p159">
       <p:transition xmlns:p14="http://schemas.microsoft.com/office/powerpoint/2010/main" spd="slow" p14:dur="2000">
         <p159:morph option="byChar"/>
       </p:transition>
     </mc:Choice>
-    <mc:Fallback>
+    <mc:Fallback xmlns="">
       <p:transition spd="slow">
         <p:fade/>
       </p:transition>
@@ -3297,7 +3297,7 @@
           <a:p>
             <a:fld id="{5BCAD085-E8A6-8845-BD4E-CB4CCA059FC4}" type="datetimeFigureOut">
               <a:rPr lang="en-US" smtClean="0"/>
-              <a:t>2/17/2026</a:t>
+              <a:t>3/18/2026</a:t>
             </a:fld>
             <a:endParaRPr lang="en-US"/>
           </a:p>
@@ -3402,13 +3402,13 @@
     <p:sldLayoutId id="2147483658" r:id="rId10"/>
     <p:sldLayoutId id="2147483659" r:id="rId11"/>
   </p:sldLayoutIdLst>
-  <mc:AlternateContent xmlns:mc="http://schemas.openxmlformats.org/markup-compatibility/2006">
-    <mc:Choice xmlns:p159="http://schemas.microsoft.com/office/powerpoint/2015/09/main" Requires="p159">
+  <mc:AlternateContent xmlns:mc="http://schemas.openxmlformats.org/markup-compatibility/2006" xmlns:p159="http://schemas.microsoft.com/office/powerpoint/2015/09/main">
+    <mc:Choice Requires="p159">
       <p:transition xmlns:p14="http://schemas.microsoft.com/office/powerpoint/2010/main" spd="slow" p14:dur="2000">
         <p159:morph option="byChar"/>
       </p:transition>
     </mc:Choice>
-    <mc:Fallback>
+    <mc:Fallback xmlns="">
       <p:transition spd="slow">
         <p:fade/>
       </p:transition>
@@ -3813,13 +3813,13 @@
   <p:clrMapOvr>
     <a:masterClrMapping/>
   </p:clrMapOvr>
-  <mc:AlternateContent xmlns:mc="http://schemas.openxmlformats.org/markup-compatibility/2006">
-    <mc:Choice xmlns:p159="http://schemas.microsoft.com/office/powerpoint/2015/09/main" Requires="p159">
+  <mc:AlternateContent xmlns:mc="http://schemas.openxmlformats.org/markup-compatibility/2006" xmlns:p159="http://schemas.microsoft.com/office/powerpoint/2015/09/main">
+    <mc:Choice Requires="p159">
       <p:transition xmlns:p14="http://schemas.microsoft.com/office/powerpoint/2010/main" spd="slow" p14:dur="2000">
         <p159:morph option="byChar"/>
       </p:transition>
     </mc:Choice>
-    <mc:Fallback>
+    <mc:Fallback xmlns="">
       <p:transition spd="slow">
         <p:fade/>
       </p:transition>
@@ -3942,13 +3942,13 @@
   <p:clrMapOvr>
     <a:masterClrMapping/>
   </p:clrMapOvr>
-  <mc:AlternateContent xmlns:mc="http://schemas.openxmlformats.org/markup-compatibility/2006">
-    <mc:Choice xmlns:p159="http://schemas.microsoft.com/office/powerpoint/2015/09/main" Requires="p159">
+  <mc:AlternateContent xmlns:mc="http://schemas.openxmlformats.org/markup-compatibility/2006" xmlns:p159="http://schemas.microsoft.com/office/powerpoint/2015/09/main">
+    <mc:Choice Requires="p159">
       <p:transition xmlns:p14="http://schemas.microsoft.com/office/powerpoint/2010/main" spd="slow" p14:dur="2000">
         <p159:morph option="byChar"/>
       </p:transition>
     </mc:Choice>
-    <mc:Fallback>
+    <mc:Fallback xmlns="">
       <p:transition spd="slow">
         <p:fade/>
       </p:transition>
@@ -4617,13 +4617,13 @@
   <p:clrMapOvr>
     <a:masterClrMapping/>
   </p:clrMapOvr>
-  <mc:AlternateContent xmlns:mc="http://schemas.openxmlformats.org/markup-compatibility/2006">
-    <mc:Choice xmlns:p159="http://schemas.microsoft.com/office/powerpoint/2015/09/main" Requires="p159">
+  <mc:AlternateContent xmlns:mc="http://schemas.openxmlformats.org/markup-compatibility/2006" xmlns:p159="http://schemas.microsoft.com/office/powerpoint/2015/09/main">
+    <mc:Choice Requires="p159">
       <p:transition xmlns:p14="http://schemas.microsoft.com/office/powerpoint/2010/main" spd="slow" p14:dur="2000">
         <p159:morph option="byChar"/>
       </p:transition>
     </mc:Choice>
-    <mc:Fallback>
+    <mc:Fallback xmlns="">
       <p:transition spd="slow">
         <p:fade/>
       </p:transition>
@@ -5107,13 +5107,13 @@
   <p:clrMapOvr>
     <a:masterClrMapping/>
   </p:clrMapOvr>
-  <mc:AlternateContent xmlns:mc="http://schemas.openxmlformats.org/markup-compatibility/2006">
-    <mc:Choice xmlns:p159="http://schemas.microsoft.com/office/powerpoint/2015/09/main" Requires="p159">
+  <mc:AlternateContent xmlns:mc="http://schemas.openxmlformats.org/markup-compatibility/2006" xmlns:p159="http://schemas.microsoft.com/office/powerpoint/2015/09/main">
+    <mc:Choice Requires="p159">
       <p:transition xmlns:p14="http://schemas.microsoft.com/office/powerpoint/2010/main" spd="slow" p14:dur="2000">
         <p159:morph option="byChar"/>
       </p:transition>
     </mc:Choice>
-    <mc:Fallback>
+    <mc:Fallback xmlns="">
       <p:transition spd="slow">
         <p:fade/>
       </p:transition>
@@ -5616,13 +5616,13 @@
   <p:clrMapOvr>
     <a:masterClrMapping/>
   </p:clrMapOvr>
-  <mc:AlternateContent xmlns:mc="http://schemas.openxmlformats.org/markup-compatibility/2006">
-    <mc:Choice xmlns:p159="http://schemas.microsoft.com/office/powerpoint/2015/09/main" Requires="p159">
+  <mc:AlternateContent xmlns:mc="http://schemas.openxmlformats.org/markup-compatibility/2006" xmlns:p159="http://schemas.microsoft.com/office/powerpoint/2015/09/main">
+    <mc:Choice Requires="p159">
       <p:transition xmlns:p14="http://schemas.microsoft.com/office/powerpoint/2010/main" spd="slow" p14:dur="2000">
         <p159:morph option="byChar"/>
       </p:transition>
     </mc:Choice>
-    <mc:Fallback>
+    <mc:Fallback xmlns="">
       <p:transition spd="slow">
         <p:fade/>
       </p:transition>
@@ -6218,13 +6218,13 @@
   <p:clrMapOvr>
     <a:masterClrMapping/>
   </p:clrMapOvr>
-  <mc:AlternateContent xmlns:mc="http://schemas.openxmlformats.org/markup-compatibility/2006">
-    <mc:Choice xmlns:p159="http://schemas.microsoft.com/office/powerpoint/2015/09/main" Requires="p159">
+  <mc:AlternateContent xmlns:mc="http://schemas.openxmlformats.org/markup-compatibility/2006" xmlns:p159="http://schemas.microsoft.com/office/powerpoint/2015/09/main">
+    <mc:Choice Requires="p159">
       <p:transition xmlns:p14="http://schemas.microsoft.com/office/powerpoint/2010/main" spd="slow" p14:dur="2000">
         <p159:morph option="byChar"/>
       </p:transition>
     </mc:Choice>
-    <mc:Fallback>
+    <mc:Fallback xmlns="">
       <p:transition spd="slow">
         <p:fade/>
       </p:transition>
@@ -6675,13 +6675,13 @@
   <p:clrMapOvr>
     <a:masterClrMapping/>
   </p:clrMapOvr>
-  <mc:AlternateContent xmlns:mc="http://schemas.openxmlformats.org/markup-compatibility/2006">
-    <mc:Choice xmlns:p159="http://schemas.microsoft.com/office/powerpoint/2015/09/main" Requires="p159">
+  <mc:AlternateContent xmlns:mc="http://schemas.openxmlformats.org/markup-compatibility/2006" xmlns:p159="http://schemas.microsoft.com/office/powerpoint/2015/09/main">
+    <mc:Choice Requires="p159">
       <p:transition xmlns:p14="http://schemas.microsoft.com/office/powerpoint/2010/main" spd="slow" p14:dur="2000">
         <p159:morph option="byChar"/>
       </p:transition>
     </mc:Choice>
-    <mc:Fallback>
+    <mc:Fallback xmlns="">
       <p:transition spd="slow">
         <p:fade/>
       </p:transition>
@@ -7104,13 +7104,13 @@
   <p:clrMapOvr>
     <a:masterClrMapping/>
   </p:clrMapOvr>
-  <mc:AlternateContent xmlns:mc="http://schemas.openxmlformats.org/markup-compatibility/2006">
-    <mc:Choice xmlns:p159="http://schemas.microsoft.com/office/powerpoint/2015/09/main" Requires="p159">
+  <mc:AlternateContent xmlns:mc="http://schemas.openxmlformats.org/markup-compatibility/2006" xmlns:p159="http://schemas.microsoft.com/office/powerpoint/2015/09/main">
+    <mc:Choice Requires="p159">
       <p:transition xmlns:p14="http://schemas.microsoft.com/office/powerpoint/2010/main" spd="slow" p14:dur="2000">
         <p159:morph option="byChar"/>
       </p:transition>
     </mc:Choice>
-    <mc:Fallback>
+    <mc:Fallback xmlns="">
       <p:transition spd="slow">
         <p:fade/>
       </p:transition>
@@ -7748,13 +7748,13 @@
   <p:clrMapOvr>
     <a:masterClrMapping/>
   </p:clrMapOvr>
-  <mc:AlternateContent xmlns:mc="http://schemas.openxmlformats.org/markup-compatibility/2006">
-    <mc:Choice xmlns:p159="http://schemas.microsoft.com/office/powerpoint/2015/09/main" Requires="p159">
+  <mc:AlternateContent xmlns:mc="http://schemas.openxmlformats.org/markup-compatibility/2006" xmlns:p159="http://schemas.microsoft.com/office/powerpoint/2015/09/main">
+    <mc:Choice Requires="p159">
       <p:transition xmlns:p14="http://schemas.microsoft.com/office/powerpoint/2010/main" spd="slow" p14:dur="2000">
         <p159:morph option="byChar"/>
       </p:transition>
     </mc:Choice>
-    <mc:Fallback>
+    <mc:Fallback xmlns="">
       <p:transition spd="slow">
         <p:fade/>
       </p:transition>
@@ -8249,13 +8249,13 @@
   <p:clrMapOvr>
     <a:masterClrMapping/>
   </p:clrMapOvr>
-  <mc:AlternateContent xmlns:mc="http://schemas.openxmlformats.org/markup-compatibility/2006">
-    <mc:Choice xmlns:p159="http://schemas.microsoft.com/office/powerpoint/2015/09/main" Requires="p159">
+  <mc:AlternateContent xmlns:mc="http://schemas.openxmlformats.org/markup-compatibility/2006" xmlns:p159="http://schemas.microsoft.com/office/powerpoint/2015/09/main">
+    <mc:Choice Requires="p159">
       <p:transition xmlns:p14="http://schemas.microsoft.com/office/powerpoint/2010/main" spd="slow" p14:dur="2000">
         <p159:morph option="byChar"/>
       </p:transition>
     </mc:Choice>
-    <mc:Fallback>
+    <mc:Fallback xmlns="">
       <p:transition spd="slow">
         <p:fade/>
       </p:transition>
@@ -8742,13 +8742,13 @@
   <p:clrMapOvr>
     <a:masterClrMapping/>
   </p:clrMapOvr>
-  <mc:AlternateContent xmlns:mc="http://schemas.openxmlformats.org/markup-compatibility/2006">
-    <mc:Choice xmlns:p159="http://schemas.microsoft.com/office/powerpoint/2015/09/main" Requires="p159">
+  <mc:AlternateContent xmlns:mc="http://schemas.openxmlformats.org/markup-compatibility/2006" xmlns:p159="http://schemas.microsoft.com/office/powerpoint/2015/09/main">
+    <mc:Choice Requires="p159">
       <p:transition xmlns:p14="http://schemas.microsoft.com/office/powerpoint/2010/main" spd="slow" p14:dur="2000">
         <p159:morph option="byChar"/>
       </p:transition>
     </mc:Choice>
-    <mc:Fallback>
+    <mc:Fallback xmlns="">
       <p:transition spd="slow">
         <p:fade/>
       </p:transition>
@@ -9402,13 +9402,13 @@
   <p:clrMapOvr>
     <a:masterClrMapping/>
   </p:clrMapOvr>
-  <mc:AlternateContent xmlns:mc="http://schemas.openxmlformats.org/markup-compatibility/2006">
-    <mc:Choice xmlns:p159="http://schemas.microsoft.com/office/powerpoint/2015/09/main" Requires="p159">
+  <mc:AlternateContent xmlns:mc="http://schemas.openxmlformats.org/markup-compatibility/2006" xmlns:p159="http://schemas.microsoft.com/office/powerpoint/2015/09/main">
+    <mc:Choice Requires="p159">
       <p:transition xmlns:p14="http://schemas.microsoft.com/office/powerpoint/2010/main" spd="slow" p14:dur="2000">
         <p159:morph option="byChar"/>
       </p:transition>
     </mc:Choice>
-    <mc:Fallback>
+    <mc:Fallback xmlns="">
       <p:transition spd="slow">
         <p:fade/>
       </p:transition>
@@ -10156,13 +10156,13 @@
   <p:clrMapOvr>
     <a:masterClrMapping/>
   </p:clrMapOvr>
-  <mc:AlternateContent xmlns:mc="http://schemas.openxmlformats.org/markup-compatibility/2006">
-    <mc:Choice xmlns:p159="http://schemas.microsoft.com/office/powerpoint/2015/09/main" Requires="p159">
+  <mc:AlternateContent xmlns:mc="http://schemas.openxmlformats.org/markup-compatibility/2006" xmlns:p159="http://schemas.microsoft.com/office/powerpoint/2015/09/main">
+    <mc:Choice Requires="p159">
       <p:transition xmlns:p14="http://schemas.microsoft.com/office/powerpoint/2010/main" spd="slow" p14:dur="2000">
         <p159:morph option="byChar"/>
       </p:transition>
     </mc:Choice>
-    <mc:Fallback>
+    <mc:Fallback xmlns="">
       <p:transition spd="slow">
         <p:fade/>
       </p:transition>
@@ -10298,13 +10298,13 @@
   <p:clrMapOvr>
     <a:masterClrMapping/>
   </p:clrMapOvr>
-  <mc:AlternateContent xmlns:mc="http://schemas.openxmlformats.org/markup-compatibility/2006">
-    <mc:Choice xmlns:p159="http://schemas.microsoft.com/office/powerpoint/2015/09/main" Requires="p159">
+  <mc:AlternateContent xmlns:mc="http://schemas.openxmlformats.org/markup-compatibility/2006" xmlns:p159="http://schemas.microsoft.com/office/powerpoint/2015/09/main">
+    <mc:Choice Requires="p159">
       <p:transition xmlns:p14="http://schemas.microsoft.com/office/powerpoint/2010/main" spd="slow" p14:dur="2000">
         <p159:morph option="byChar"/>
       </p:transition>
     </mc:Choice>
-    <mc:Fallback>
+    <mc:Fallback xmlns="">
       <p:transition spd="slow">
         <p:fade/>
       </p:transition>
@@ -10457,13 +10457,13 @@
   <p:clrMapOvr>
     <a:masterClrMapping/>
   </p:clrMapOvr>
-  <mc:AlternateContent xmlns:mc="http://schemas.openxmlformats.org/markup-compatibility/2006">
-    <mc:Choice xmlns:p159="http://schemas.microsoft.com/office/powerpoint/2015/09/main" Requires="p159">
+  <mc:AlternateContent xmlns:mc="http://schemas.openxmlformats.org/markup-compatibility/2006" xmlns:p159="http://schemas.microsoft.com/office/powerpoint/2015/09/main">
+    <mc:Choice Requires="p159">
       <p:transition xmlns:p14="http://schemas.microsoft.com/office/powerpoint/2010/main" spd="slow" p14:dur="2000">
         <p159:morph option="byChar"/>
       </p:transition>
     </mc:Choice>
-    <mc:Fallback>
+    <mc:Fallback xmlns="">
       <p:transition spd="slow">
         <p:fade/>
       </p:transition>
